--- a/Documents/Object Property Design and Binding.pptx
+++ b/Documents/Object Property Design and Binding.pptx
@@ -18015,7 +18015,9 @@
         </p:nvSpPr>
         <p:spPr/>
         <p:txBody>
-          <a:bodyPr/>
+          <a:bodyPr>
+            <a:normAutofit fontScale="85000" lnSpcReduction="20000"/>
+          </a:bodyPr>
           <a:lstStyle/>
           <a:p>
             <a:pPr marL="0" indent="0">
@@ -18055,6 +18057,32 @@
               <a:rPr lang="en-US" dirty="0"/>
               <a:t>The game object declares the singleton repository as a property to prevent it from being serialized.</a:t>
             </a:r>
+          </a:p>
+          <a:p>
+            <a:pPr marL="0" indent="0">
+              <a:buNone/>
+            </a:pPr>
+            <a:r>
+              <a:rPr lang="en-US" i="1" dirty="0">
+                <a:highlight>
+                  <a:srgbClr val="FFFF00"/>
+                </a:highlight>
+              </a:rPr>
+              <a:t>Because properties are ignored, there is an issue where a property may have state data that is ignored.  Also, interfaces can only be implemented with properties.  The Attribute has an Index property that needs to be rehydrated.  If the game configuration is loaded in a different order, the read only attribute sets will </a:t>
+            </a:r>
+            <a:r>
+              <a:rPr lang="en-US" i="1">
+                <a:highlight>
+                  <a:srgbClr val="FFFF00"/>
+                </a:highlight>
+              </a:rPr>
+              <a:t>be confused.</a:t>
+            </a:r>
+            <a:endParaRPr lang="en-US" i="1" dirty="0">
+              <a:highlight>
+                <a:srgbClr val="FFFF00"/>
+              </a:highlight>
+            </a:endParaRPr>
           </a:p>
         </p:txBody>
       </p:sp>

--- a/Documents/Object Property Design and Binding.pptx
+++ b/Documents/Object Property Design and Binding.pptx
@@ -49,6 +49,8 @@
     <p:sldId id="271" r:id="rId43"/>
     <p:sldId id="272" r:id="rId44"/>
     <p:sldId id="273" r:id="rId45"/>
+    <p:sldId id="302" r:id="rId46"/>
+    <p:sldId id="303" r:id="rId47"/>
   </p:sldIdLst>
   <p:sldSz cx="12192000" cy="6858000"/>
   <p:notesSz cx="6858000" cy="9144000"/>
@@ -302,7 +304,7 @@
           <a:p>
             <a:fld id="{E7AEA4B1-7707-49BB-9265-EAC029350772}" type="datetimeFigureOut">
               <a:rPr lang="en-US" smtClean="0"/>
-              <a:t>5/2/2026</a:t>
+              <a:t>5/28/2026</a:t>
             </a:fld>
             <a:endParaRPr lang="en-US"/>
           </a:p>
@@ -500,7 +502,7 @@
           <a:p>
             <a:fld id="{E7AEA4B1-7707-49BB-9265-EAC029350772}" type="datetimeFigureOut">
               <a:rPr lang="en-US" smtClean="0"/>
-              <a:t>5/2/2026</a:t>
+              <a:t>5/28/2026</a:t>
             </a:fld>
             <a:endParaRPr lang="en-US"/>
           </a:p>
@@ -708,7 +710,7 @@
           <a:p>
             <a:fld id="{E7AEA4B1-7707-49BB-9265-EAC029350772}" type="datetimeFigureOut">
               <a:rPr lang="en-US" smtClean="0"/>
-              <a:t>5/2/2026</a:t>
+              <a:t>5/28/2026</a:t>
             </a:fld>
             <a:endParaRPr lang="en-US"/>
           </a:p>
@@ -906,7 +908,7 @@
           <a:p>
             <a:fld id="{E7AEA4B1-7707-49BB-9265-EAC029350772}" type="datetimeFigureOut">
               <a:rPr lang="en-US" smtClean="0"/>
-              <a:t>5/2/2026</a:t>
+              <a:t>5/28/2026</a:t>
             </a:fld>
             <a:endParaRPr lang="en-US"/>
           </a:p>
@@ -1181,7 +1183,7 @@
           <a:p>
             <a:fld id="{E7AEA4B1-7707-49BB-9265-EAC029350772}" type="datetimeFigureOut">
               <a:rPr lang="en-US" smtClean="0"/>
-              <a:t>5/2/2026</a:t>
+              <a:t>5/28/2026</a:t>
             </a:fld>
             <a:endParaRPr lang="en-US"/>
           </a:p>
@@ -1446,7 +1448,7 @@
           <a:p>
             <a:fld id="{E7AEA4B1-7707-49BB-9265-EAC029350772}" type="datetimeFigureOut">
               <a:rPr lang="en-US" smtClean="0"/>
-              <a:t>5/2/2026</a:t>
+              <a:t>5/28/2026</a:t>
             </a:fld>
             <a:endParaRPr lang="en-US"/>
           </a:p>
@@ -1858,7 +1860,7 @@
           <a:p>
             <a:fld id="{E7AEA4B1-7707-49BB-9265-EAC029350772}" type="datetimeFigureOut">
               <a:rPr lang="en-US" smtClean="0"/>
-              <a:t>5/2/2026</a:t>
+              <a:t>5/28/2026</a:t>
             </a:fld>
             <a:endParaRPr lang="en-US"/>
           </a:p>
@@ -1999,7 +2001,7 @@
           <a:p>
             <a:fld id="{E7AEA4B1-7707-49BB-9265-EAC029350772}" type="datetimeFigureOut">
               <a:rPr lang="en-US" smtClean="0"/>
-              <a:t>5/2/2026</a:t>
+              <a:t>5/28/2026</a:t>
             </a:fld>
             <a:endParaRPr lang="en-US"/>
           </a:p>
@@ -2112,7 +2114,7 @@
           <a:p>
             <a:fld id="{E7AEA4B1-7707-49BB-9265-EAC029350772}" type="datetimeFigureOut">
               <a:rPr lang="en-US" smtClean="0"/>
-              <a:t>5/2/2026</a:t>
+              <a:t>5/28/2026</a:t>
             </a:fld>
             <a:endParaRPr lang="en-US"/>
           </a:p>
@@ -2423,7 +2425,7 @@
           <a:p>
             <a:fld id="{E7AEA4B1-7707-49BB-9265-EAC029350772}" type="datetimeFigureOut">
               <a:rPr lang="en-US" smtClean="0"/>
-              <a:t>5/2/2026</a:t>
+              <a:t>5/28/2026</a:t>
             </a:fld>
             <a:endParaRPr lang="en-US"/>
           </a:p>
@@ -2711,7 +2713,7 @@
           <a:p>
             <a:fld id="{E7AEA4B1-7707-49BB-9265-EAC029350772}" type="datetimeFigureOut">
               <a:rPr lang="en-US" smtClean="0"/>
-              <a:t>5/2/2026</a:t>
+              <a:t>5/28/2026</a:t>
             </a:fld>
             <a:endParaRPr lang="en-US"/>
           </a:p>
@@ -2952,7 +2954,7 @@
           <a:p>
             <a:fld id="{E7AEA4B1-7707-49BB-9265-EAC029350772}" type="datetimeFigureOut">
               <a:rPr lang="en-US" smtClean="0"/>
-              <a:t>5/2/2026</a:t>
+              <a:t>5/28/2026</a:t>
             </a:fld>
             <a:endParaRPr lang="en-US"/>
           </a:p>
@@ -20218,6 +20220,1254 @@
 </p:sld>
 </file>
 
+<file path=ppt/slides/slide45.xml><?xml version="1.0" encoding="utf-8"?>
+<p:sld xmlns:a="http://schemas.openxmlformats.org/drawingml/2006/main" xmlns:r="http://schemas.openxmlformats.org/officeDocument/2006/relationships" xmlns:p="http://schemas.openxmlformats.org/presentationml/2006/main">
+  <p:cSld>
+    <p:spTree>
+      <p:nvGrpSpPr>
+        <p:cNvPr id="1" name=""/>
+        <p:cNvGrpSpPr/>
+        <p:nvPr/>
+      </p:nvGrpSpPr>
+      <p:grpSpPr>
+        <a:xfrm>
+          <a:off x="0" y="0"/>
+          <a:ext cx="0" cy="0"/>
+          <a:chOff x="0" y="0"/>
+          <a:chExt cx="0" cy="0"/>
+        </a:xfrm>
+      </p:grpSpPr>
+      <p:sp>
+        <p:nvSpPr>
+          <p:cNvPr id="2" name="Title 1">
+            <a:extLst>
+              <a:ext uri="{FF2B5EF4-FFF2-40B4-BE49-F238E27FC236}">
+                <a16:creationId xmlns:a16="http://schemas.microsoft.com/office/drawing/2014/main" id="{2B4956E5-2CF7-C938-BA70-E05771DE42AF}"/>
+              </a:ext>
+            </a:extLst>
+          </p:cNvPr>
+          <p:cNvSpPr>
+            <a:spLocks noGrp="1"/>
+          </p:cNvSpPr>
+          <p:nvPr>
+            <p:ph type="title"/>
+          </p:nvPr>
+        </p:nvSpPr>
+        <p:spPr/>
+        <p:txBody>
+          <a:bodyPr/>
+          <a:lstStyle/>
+          <a:p>
+            <a:r>
+              <a:rPr lang="en-US" dirty="0"/>
+              <a:t>Expressions</a:t>
+            </a:r>
+          </a:p>
+        </p:txBody>
+      </p:sp>
+      <p:sp>
+        <p:nvSpPr>
+          <p:cNvPr id="4" name="Rectangle 3">
+            <a:extLst>
+              <a:ext uri="{FF2B5EF4-FFF2-40B4-BE49-F238E27FC236}">
+                <a16:creationId xmlns:a16="http://schemas.microsoft.com/office/drawing/2014/main" id="{08C6666D-578B-420E-1F20-ACAEA9302AAA}"/>
+              </a:ext>
+            </a:extLst>
+          </p:cNvPr>
+          <p:cNvSpPr/>
+          <p:nvPr/>
+        </p:nvSpPr>
+        <p:spPr>
+          <a:xfrm>
+            <a:off x="3356517" y="6091431"/>
+            <a:ext cx="845633" cy="253613"/>
+          </a:xfrm>
+          <a:prstGeom prst="rect">
+            <a:avLst/>
+          </a:prstGeom>
+        </p:spPr>
+        <p:style>
+          <a:lnRef idx="2">
+            <a:schemeClr val="accent1">
+              <a:shade val="15000"/>
+            </a:schemeClr>
+          </a:lnRef>
+          <a:fillRef idx="1">
+            <a:schemeClr val="accent1"/>
+          </a:fillRef>
+          <a:effectRef idx="0">
+            <a:schemeClr val="accent1"/>
+          </a:effectRef>
+          <a:fontRef idx="minor">
+            <a:schemeClr val="lt1"/>
+          </a:fontRef>
+        </p:style>
+        <p:txBody>
+          <a:bodyPr rtlCol="0" anchor="ctr"/>
+          <a:lstStyle/>
+          <a:p>
+            <a:pPr algn="ctr"/>
+            <a:r>
+              <a:rPr lang="en-US" sz="1000" dirty="0"/>
+              <a:t>Expression</a:t>
+            </a:r>
+          </a:p>
+        </p:txBody>
+      </p:sp>
+      <p:sp>
+        <p:nvSpPr>
+          <p:cNvPr id="5" name="Rectangle 4">
+            <a:extLst>
+              <a:ext uri="{FF2B5EF4-FFF2-40B4-BE49-F238E27FC236}">
+                <a16:creationId xmlns:a16="http://schemas.microsoft.com/office/drawing/2014/main" id="{94BAC70F-B48D-3120-4CF1-F79A6205919C}"/>
+              </a:ext>
+            </a:extLst>
+          </p:cNvPr>
+          <p:cNvSpPr/>
+          <p:nvPr/>
+        </p:nvSpPr>
+        <p:spPr>
+          <a:xfrm>
+            <a:off x="821231" y="5037790"/>
+            <a:ext cx="895813" cy="361407"/>
+          </a:xfrm>
+          <a:prstGeom prst="rect">
+            <a:avLst/>
+          </a:prstGeom>
+        </p:spPr>
+        <p:style>
+          <a:lnRef idx="2">
+            <a:schemeClr val="accent1">
+              <a:shade val="15000"/>
+            </a:schemeClr>
+          </a:lnRef>
+          <a:fillRef idx="1">
+            <a:schemeClr val="accent1"/>
+          </a:fillRef>
+          <a:effectRef idx="0">
+            <a:schemeClr val="accent1"/>
+          </a:effectRef>
+          <a:fontRef idx="minor">
+            <a:schemeClr val="lt1"/>
+          </a:fontRef>
+        </p:style>
+        <p:txBody>
+          <a:bodyPr rtlCol="0" anchor="ctr"/>
+          <a:lstStyle/>
+          <a:p>
+            <a:pPr algn="ctr"/>
+            <a:r>
+              <a:rPr lang="en-US" sz="1000" dirty="0"/>
+              <a:t>Decimal Expression</a:t>
+            </a:r>
+          </a:p>
+        </p:txBody>
+      </p:sp>
+      <p:sp>
+        <p:nvSpPr>
+          <p:cNvPr id="6" name="Rectangle 5">
+            <a:extLst>
+              <a:ext uri="{FF2B5EF4-FFF2-40B4-BE49-F238E27FC236}">
+                <a16:creationId xmlns:a16="http://schemas.microsoft.com/office/drawing/2014/main" id="{456B5B0A-8973-0456-C76D-944692B00E0E}"/>
+              </a:ext>
+            </a:extLst>
+          </p:cNvPr>
+          <p:cNvSpPr/>
+          <p:nvPr/>
+        </p:nvSpPr>
+        <p:spPr>
+          <a:xfrm>
+            <a:off x="3953684" y="5061537"/>
+            <a:ext cx="895813" cy="361407"/>
+          </a:xfrm>
+          <a:prstGeom prst="rect">
+            <a:avLst/>
+          </a:prstGeom>
+        </p:spPr>
+        <p:style>
+          <a:lnRef idx="2">
+            <a:schemeClr val="accent1">
+              <a:shade val="15000"/>
+            </a:schemeClr>
+          </a:lnRef>
+          <a:fillRef idx="1">
+            <a:schemeClr val="accent1"/>
+          </a:fillRef>
+          <a:effectRef idx="0">
+            <a:schemeClr val="accent1"/>
+          </a:effectRef>
+          <a:fontRef idx="minor">
+            <a:schemeClr val="lt1"/>
+          </a:fontRef>
+        </p:style>
+        <p:txBody>
+          <a:bodyPr rtlCol="0" anchor="ctr"/>
+          <a:lstStyle/>
+          <a:p>
+            <a:pPr algn="ctr"/>
+            <a:r>
+              <a:rPr lang="en-US" sz="1000" dirty="0"/>
+              <a:t>Identifier Expression</a:t>
+            </a:r>
+          </a:p>
+        </p:txBody>
+      </p:sp>
+      <p:sp>
+        <p:nvSpPr>
+          <p:cNvPr id="7" name="Rectangle 6">
+            <a:extLst>
+              <a:ext uri="{FF2B5EF4-FFF2-40B4-BE49-F238E27FC236}">
+                <a16:creationId xmlns:a16="http://schemas.microsoft.com/office/drawing/2014/main" id="{2DB5EA65-3D68-6E90-3479-A0751E8AE2D6}"/>
+              </a:ext>
+            </a:extLst>
+          </p:cNvPr>
+          <p:cNvSpPr/>
+          <p:nvPr/>
+        </p:nvSpPr>
+        <p:spPr>
+          <a:xfrm>
+            <a:off x="5023847" y="5028642"/>
+            <a:ext cx="895813" cy="361407"/>
+          </a:xfrm>
+          <a:prstGeom prst="rect">
+            <a:avLst/>
+          </a:prstGeom>
+        </p:spPr>
+        <p:style>
+          <a:lnRef idx="2">
+            <a:schemeClr val="accent1">
+              <a:shade val="15000"/>
+            </a:schemeClr>
+          </a:lnRef>
+          <a:fillRef idx="1">
+            <a:schemeClr val="accent1"/>
+          </a:fillRef>
+          <a:effectRef idx="0">
+            <a:schemeClr val="accent1"/>
+          </a:effectRef>
+          <a:fontRef idx="minor">
+            <a:schemeClr val="lt1"/>
+          </a:fontRef>
+        </p:style>
+        <p:txBody>
+          <a:bodyPr rtlCol="0" anchor="ctr"/>
+          <a:lstStyle/>
+          <a:p>
+            <a:pPr algn="ctr"/>
+            <a:r>
+              <a:rPr lang="en-US" sz="1000" dirty="0"/>
+              <a:t>Integer Expression</a:t>
+            </a:r>
+          </a:p>
+        </p:txBody>
+      </p:sp>
+      <p:sp>
+        <p:nvSpPr>
+          <p:cNvPr id="8" name="Rectangle 7">
+            <a:extLst>
+              <a:ext uri="{FF2B5EF4-FFF2-40B4-BE49-F238E27FC236}">
+                <a16:creationId xmlns:a16="http://schemas.microsoft.com/office/drawing/2014/main" id="{4BC114AE-2729-9B7A-1645-C935341A3820}"/>
+              </a:ext>
+            </a:extLst>
+          </p:cNvPr>
+          <p:cNvSpPr/>
+          <p:nvPr/>
+        </p:nvSpPr>
+        <p:spPr>
+          <a:xfrm>
+            <a:off x="6060447" y="5026077"/>
+            <a:ext cx="895813" cy="361407"/>
+          </a:xfrm>
+          <a:prstGeom prst="rect">
+            <a:avLst/>
+          </a:prstGeom>
+        </p:spPr>
+        <p:style>
+          <a:lnRef idx="2">
+            <a:schemeClr val="accent1">
+              <a:shade val="15000"/>
+            </a:schemeClr>
+          </a:lnRef>
+          <a:fillRef idx="1">
+            <a:schemeClr val="accent1"/>
+          </a:fillRef>
+          <a:effectRef idx="0">
+            <a:schemeClr val="accent1"/>
+          </a:effectRef>
+          <a:fontRef idx="minor">
+            <a:schemeClr val="lt1"/>
+          </a:fontRef>
+        </p:style>
+        <p:txBody>
+          <a:bodyPr rtlCol="0" anchor="ctr"/>
+          <a:lstStyle/>
+          <a:p>
+            <a:pPr algn="ctr"/>
+            <a:r>
+              <a:rPr lang="en-US" sz="1000" dirty="0"/>
+              <a:t>Infix Expression</a:t>
+            </a:r>
+          </a:p>
+        </p:txBody>
+      </p:sp>
+      <p:sp>
+        <p:nvSpPr>
+          <p:cNvPr id="9" name="Rectangle 8">
+            <a:extLst>
+              <a:ext uri="{FF2B5EF4-FFF2-40B4-BE49-F238E27FC236}">
+                <a16:creationId xmlns:a16="http://schemas.microsoft.com/office/drawing/2014/main" id="{7B2E223F-2240-B153-62E3-8FED57945624}"/>
+              </a:ext>
+            </a:extLst>
+          </p:cNvPr>
+          <p:cNvSpPr/>
+          <p:nvPr/>
+        </p:nvSpPr>
+        <p:spPr>
+          <a:xfrm>
+            <a:off x="2883521" y="5037786"/>
+            <a:ext cx="895813" cy="361407"/>
+          </a:xfrm>
+          <a:prstGeom prst="rect">
+            <a:avLst/>
+          </a:prstGeom>
+        </p:spPr>
+        <p:style>
+          <a:lnRef idx="2">
+            <a:schemeClr val="accent1">
+              <a:shade val="15000"/>
+            </a:schemeClr>
+          </a:lnRef>
+          <a:fillRef idx="1">
+            <a:schemeClr val="accent1"/>
+          </a:fillRef>
+          <a:effectRef idx="0">
+            <a:schemeClr val="accent1"/>
+          </a:effectRef>
+          <a:fontRef idx="minor">
+            <a:schemeClr val="lt1"/>
+          </a:fontRef>
+        </p:style>
+        <p:txBody>
+          <a:bodyPr rtlCol="0" anchor="ctr"/>
+          <a:lstStyle/>
+          <a:p>
+            <a:pPr algn="ctr"/>
+            <a:r>
+              <a:rPr lang="en-US" sz="1000" dirty="0"/>
+              <a:t>Parenthesis Expression</a:t>
+            </a:r>
+          </a:p>
+        </p:txBody>
+      </p:sp>
+      <p:sp>
+        <p:nvSpPr>
+          <p:cNvPr id="10" name="Rectangle 9">
+            <a:extLst>
+              <a:ext uri="{FF2B5EF4-FFF2-40B4-BE49-F238E27FC236}">
+                <a16:creationId xmlns:a16="http://schemas.microsoft.com/office/drawing/2014/main" id="{49E08E24-4560-8B9F-2522-4D6638C95DC7}"/>
+              </a:ext>
+            </a:extLst>
+          </p:cNvPr>
+          <p:cNvSpPr/>
+          <p:nvPr/>
+        </p:nvSpPr>
+        <p:spPr>
+          <a:xfrm>
+            <a:off x="1857831" y="5037788"/>
+            <a:ext cx="895813" cy="361407"/>
+          </a:xfrm>
+          <a:prstGeom prst="rect">
+            <a:avLst/>
+          </a:prstGeom>
+        </p:spPr>
+        <p:style>
+          <a:lnRef idx="2">
+            <a:schemeClr val="accent1">
+              <a:shade val="15000"/>
+            </a:schemeClr>
+          </a:lnRef>
+          <a:fillRef idx="1">
+            <a:schemeClr val="accent1"/>
+          </a:fillRef>
+          <a:effectRef idx="0">
+            <a:schemeClr val="accent1"/>
+          </a:effectRef>
+          <a:fontRef idx="minor">
+            <a:schemeClr val="lt1"/>
+          </a:fontRef>
+        </p:style>
+        <p:txBody>
+          <a:bodyPr rtlCol="0" anchor="ctr"/>
+          <a:lstStyle/>
+          <a:p>
+            <a:pPr algn="ctr"/>
+            <a:r>
+              <a:rPr lang="en-US" sz="1000" dirty="0"/>
+              <a:t>Boolean </a:t>
+            </a:r>
+          </a:p>
+          <a:p>
+            <a:pPr algn="ctr"/>
+            <a:r>
+              <a:rPr lang="en-US" sz="1000" dirty="0"/>
+              <a:t>Expression</a:t>
+            </a:r>
+          </a:p>
+        </p:txBody>
+      </p:sp>
+      <p:cxnSp>
+        <p:nvCxnSpPr>
+          <p:cNvPr id="35" name="Connector: Elbow 34">
+            <a:extLst>
+              <a:ext uri="{FF2B5EF4-FFF2-40B4-BE49-F238E27FC236}">
+                <a16:creationId xmlns:a16="http://schemas.microsoft.com/office/drawing/2014/main" id="{D140A1A9-55D7-997F-DF40-27A094A1687E}"/>
+              </a:ext>
+            </a:extLst>
+          </p:cNvPr>
+          <p:cNvCxnSpPr>
+            <a:cxnSpLocks/>
+            <a:stCxn id="5" idx="2"/>
+            <a:endCxn id="4" idx="0"/>
+          </p:cNvCxnSpPr>
+          <p:nvPr/>
+        </p:nvCxnSpPr>
+        <p:spPr>
+          <a:xfrm rot="16200000" flipH="1">
+            <a:off x="2178119" y="4490216"/>
+            <a:ext cx="692234" cy="2510196"/>
+          </a:xfrm>
+          <a:prstGeom prst="bentConnector3">
+            <a:avLst/>
+          </a:prstGeom>
+          <a:ln>
+            <a:tailEnd type="triangle"/>
+          </a:ln>
+        </p:spPr>
+        <p:style>
+          <a:lnRef idx="2">
+            <a:schemeClr val="accent1"/>
+          </a:lnRef>
+          <a:fillRef idx="0">
+            <a:schemeClr val="accent1"/>
+          </a:fillRef>
+          <a:effectRef idx="1">
+            <a:schemeClr val="accent1"/>
+          </a:effectRef>
+          <a:fontRef idx="minor">
+            <a:schemeClr val="tx1"/>
+          </a:fontRef>
+        </p:style>
+      </p:cxnSp>
+      <p:cxnSp>
+        <p:nvCxnSpPr>
+          <p:cNvPr id="36" name="Connector: Elbow 35">
+            <a:extLst>
+              <a:ext uri="{FF2B5EF4-FFF2-40B4-BE49-F238E27FC236}">
+                <a16:creationId xmlns:a16="http://schemas.microsoft.com/office/drawing/2014/main" id="{0C598C3F-3E5A-2D4D-C798-5E5B3F54E816}"/>
+              </a:ext>
+            </a:extLst>
+          </p:cNvPr>
+          <p:cNvCxnSpPr>
+            <a:cxnSpLocks/>
+            <a:stCxn id="10" idx="2"/>
+            <a:endCxn id="4" idx="0"/>
+          </p:cNvCxnSpPr>
+          <p:nvPr/>
+        </p:nvCxnSpPr>
+        <p:spPr>
+          <a:xfrm rot="16200000" flipH="1">
+            <a:off x="2696418" y="5008515"/>
+            <a:ext cx="692236" cy="1473596"/>
+          </a:xfrm>
+          <a:prstGeom prst="bentConnector3">
+            <a:avLst>
+              <a:gd name="adj1" fmla="val 50000"/>
+            </a:avLst>
+          </a:prstGeom>
+          <a:ln>
+            <a:tailEnd type="triangle"/>
+          </a:ln>
+        </p:spPr>
+        <p:style>
+          <a:lnRef idx="2">
+            <a:schemeClr val="accent1"/>
+          </a:lnRef>
+          <a:fillRef idx="0">
+            <a:schemeClr val="accent1"/>
+          </a:fillRef>
+          <a:effectRef idx="1">
+            <a:schemeClr val="accent1"/>
+          </a:effectRef>
+          <a:fontRef idx="minor">
+            <a:schemeClr val="tx1"/>
+          </a:fontRef>
+        </p:style>
+      </p:cxnSp>
+      <p:cxnSp>
+        <p:nvCxnSpPr>
+          <p:cNvPr id="39" name="Connector: Elbow 38">
+            <a:extLst>
+              <a:ext uri="{FF2B5EF4-FFF2-40B4-BE49-F238E27FC236}">
+                <a16:creationId xmlns:a16="http://schemas.microsoft.com/office/drawing/2014/main" id="{0CD0685F-4145-8B9A-2D50-88191AF8CDF0}"/>
+              </a:ext>
+            </a:extLst>
+          </p:cNvPr>
+          <p:cNvCxnSpPr>
+            <a:cxnSpLocks/>
+            <a:stCxn id="9" idx="2"/>
+            <a:endCxn id="4" idx="0"/>
+          </p:cNvCxnSpPr>
+          <p:nvPr/>
+        </p:nvCxnSpPr>
+        <p:spPr>
+          <a:xfrm rot="16200000" flipH="1">
+            <a:off x="3209262" y="5521359"/>
+            <a:ext cx="692238" cy="447906"/>
+          </a:xfrm>
+          <a:prstGeom prst="bentConnector3">
+            <a:avLst/>
+          </a:prstGeom>
+          <a:ln>
+            <a:tailEnd type="triangle"/>
+          </a:ln>
+        </p:spPr>
+        <p:style>
+          <a:lnRef idx="2">
+            <a:schemeClr val="accent1"/>
+          </a:lnRef>
+          <a:fillRef idx="0">
+            <a:schemeClr val="accent1"/>
+          </a:fillRef>
+          <a:effectRef idx="1">
+            <a:schemeClr val="accent1"/>
+          </a:effectRef>
+          <a:fontRef idx="minor">
+            <a:schemeClr val="tx1"/>
+          </a:fontRef>
+        </p:style>
+      </p:cxnSp>
+      <p:cxnSp>
+        <p:nvCxnSpPr>
+          <p:cNvPr id="42" name="Connector: Elbow 41">
+            <a:extLst>
+              <a:ext uri="{FF2B5EF4-FFF2-40B4-BE49-F238E27FC236}">
+                <a16:creationId xmlns:a16="http://schemas.microsoft.com/office/drawing/2014/main" id="{26A155E2-4E51-68E4-BC35-DBDFC8421104}"/>
+              </a:ext>
+            </a:extLst>
+          </p:cNvPr>
+          <p:cNvCxnSpPr>
+            <a:cxnSpLocks/>
+            <a:stCxn id="8" idx="2"/>
+            <a:endCxn id="4" idx="0"/>
+          </p:cNvCxnSpPr>
+          <p:nvPr/>
+        </p:nvCxnSpPr>
+        <p:spPr>
+          <a:xfrm rot="5400000">
+            <a:off x="4791871" y="4374947"/>
+            <a:ext cx="703947" cy="2729020"/>
+          </a:xfrm>
+          <a:prstGeom prst="bentConnector3">
+            <a:avLst/>
+          </a:prstGeom>
+          <a:ln>
+            <a:tailEnd type="triangle"/>
+          </a:ln>
+        </p:spPr>
+        <p:style>
+          <a:lnRef idx="2">
+            <a:schemeClr val="accent1"/>
+          </a:lnRef>
+          <a:fillRef idx="0">
+            <a:schemeClr val="accent1"/>
+          </a:fillRef>
+          <a:effectRef idx="1">
+            <a:schemeClr val="accent1"/>
+          </a:effectRef>
+          <a:fontRef idx="minor">
+            <a:schemeClr val="tx1"/>
+          </a:fontRef>
+        </p:style>
+      </p:cxnSp>
+      <p:cxnSp>
+        <p:nvCxnSpPr>
+          <p:cNvPr id="45" name="Connector: Elbow 44">
+            <a:extLst>
+              <a:ext uri="{FF2B5EF4-FFF2-40B4-BE49-F238E27FC236}">
+                <a16:creationId xmlns:a16="http://schemas.microsoft.com/office/drawing/2014/main" id="{838FA0FD-1ED6-4B6E-0A8B-BE3B8F08BC0A}"/>
+              </a:ext>
+            </a:extLst>
+          </p:cNvPr>
+          <p:cNvCxnSpPr>
+            <a:cxnSpLocks/>
+            <a:stCxn id="7" idx="2"/>
+            <a:endCxn id="4" idx="0"/>
+          </p:cNvCxnSpPr>
+          <p:nvPr/>
+        </p:nvCxnSpPr>
+        <p:spPr>
+          <a:xfrm rot="5400000">
+            <a:off x="4274853" y="4894530"/>
+            <a:ext cx="701382" cy="1692420"/>
+          </a:xfrm>
+          <a:prstGeom prst="bentConnector3">
+            <a:avLst/>
+          </a:prstGeom>
+          <a:ln>
+            <a:tailEnd type="triangle"/>
+          </a:ln>
+        </p:spPr>
+        <p:style>
+          <a:lnRef idx="2">
+            <a:schemeClr val="accent1"/>
+          </a:lnRef>
+          <a:fillRef idx="0">
+            <a:schemeClr val="accent1"/>
+          </a:fillRef>
+          <a:effectRef idx="1">
+            <a:schemeClr val="accent1"/>
+          </a:effectRef>
+          <a:fontRef idx="minor">
+            <a:schemeClr val="tx1"/>
+          </a:fontRef>
+        </p:style>
+      </p:cxnSp>
+      <p:cxnSp>
+        <p:nvCxnSpPr>
+          <p:cNvPr id="48" name="Connector: Elbow 47">
+            <a:extLst>
+              <a:ext uri="{FF2B5EF4-FFF2-40B4-BE49-F238E27FC236}">
+                <a16:creationId xmlns:a16="http://schemas.microsoft.com/office/drawing/2014/main" id="{E34265AA-8022-4F9E-81DA-F8F9F1A7F92D}"/>
+              </a:ext>
+            </a:extLst>
+          </p:cNvPr>
+          <p:cNvCxnSpPr>
+            <a:cxnSpLocks/>
+            <a:stCxn id="6" idx="2"/>
+            <a:endCxn id="4" idx="0"/>
+          </p:cNvCxnSpPr>
+          <p:nvPr/>
+        </p:nvCxnSpPr>
+        <p:spPr>
+          <a:xfrm rot="5400000">
+            <a:off x="3756220" y="5446059"/>
+            <a:ext cx="668487" cy="622257"/>
+          </a:xfrm>
+          <a:prstGeom prst="bentConnector3">
+            <a:avLst>
+              <a:gd name="adj1" fmla="val 50000"/>
+            </a:avLst>
+          </a:prstGeom>
+          <a:ln>
+            <a:tailEnd type="triangle"/>
+          </a:ln>
+        </p:spPr>
+        <p:style>
+          <a:lnRef idx="2">
+            <a:schemeClr val="accent1"/>
+          </a:lnRef>
+          <a:fillRef idx="0">
+            <a:schemeClr val="accent1"/>
+          </a:fillRef>
+          <a:effectRef idx="1">
+            <a:schemeClr val="accent1"/>
+          </a:effectRef>
+          <a:fontRef idx="minor">
+            <a:schemeClr val="tx1"/>
+          </a:fontRef>
+        </p:style>
+      </p:cxnSp>
+      <p:sp>
+        <p:nvSpPr>
+          <p:cNvPr id="51" name="Rectangle 50">
+            <a:extLst>
+              <a:ext uri="{FF2B5EF4-FFF2-40B4-BE49-F238E27FC236}">
+                <a16:creationId xmlns:a16="http://schemas.microsoft.com/office/drawing/2014/main" id="{B8DFD506-1BE8-92B3-F56C-FA6AEC2CE2D9}"/>
+              </a:ext>
+            </a:extLst>
+          </p:cNvPr>
+          <p:cNvSpPr/>
+          <p:nvPr/>
+        </p:nvSpPr>
+        <p:spPr>
+          <a:xfrm>
+            <a:off x="5023847" y="3593766"/>
+            <a:ext cx="1094678" cy="361407"/>
+          </a:xfrm>
+          <a:prstGeom prst="rect">
+            <a:avLst/>
+          </a:prstGeom>
+        </p:spPr>
+        <p:style>
+          <a:lnRef idx="2">
+            <a:schemeClr val="accent1">
+              <a:shade val="15000"/>
+            </a:schemeClr>
+          </a:lnRef>
+          <a:fillRef idx="1">
+            <a:schemeClr val="accent1"/>
+          </a:fillRef>
+          <a:effectRef idx="0">
+            <a:schemeClr val="accent1"/>
+          </a:effectRef>
+          <a:fontRef idx="minor">
+            <a:schemeClr val="lt1"/>
+          </a:fontRef>
+        </p:style>
+        <p:txBody>
+          <a:bodyPr rtlCol="0" anchor="ctr"/>
+          <a:lstStyle/>
+          <a:p>
+            <a:pPr algn="ctr"/>
+            <a:r>
+              <a:rPr lang="en-US" sz="1000" dirty="0"/>
+              <a:t>Division</a:t>
+            </a:r>
+          </a:p>
+          <a:p>
+            <a:pPr algn="ctr"/>
+            <a:r>
+              <a:rPr lang="en-US" sz="1000" dirty="0"/>
+              <a:t>Infix Expression</a:t>
+            </a:r>
+          </a:p>
+        </p:txBody>
+      </p:sp>
+      <p:sp>
+        <p:nvSpPr>
+          <p:cNvPr id="52" name="Rectangle 51">
+            <a:extLst>
+              <a:ext uri="{FF2B5EF4-FFF2-40B4-BE49-F238E27FC236}">
+                <a16:creationId xmlns:a16="http://schemas.microsoft.com/office/drawing/2014/main" id="{F542236B-8A9A-0309-508C-0A55FE896BC7}"/>
+              </a:ext>
+            </a:extLst>
+          </p:cNvPr>
+          <p:cNvSpPr/>
+          <p:nvPr/>
+        </p:nvSpPr>
+        <p:spPr>
+          <a:xfrm>
+            <a:off x="6193443" y="3593766"/>
+            <a:ext cx="1094678" cy="361407"/>
+          </a:xfrm>
+          <a:prstGeom prst="rect">
+            <a:avLst/>
+          </a:prstGeom>
+        </p:spPr>
+        <p:style>
+          <a:lnRef idx="2">
+            <a:schemeClr val="accent1">
+              <a:shade val="15000"/>
+            </a:schemeClr>
+          </a:lnRef>
+          <a:fillRef idx="1">
+            <a:schemeClr val="accent1"/>
+          </a:fillRef>
+          <a:effectRef idx="0">
+            <a:schemeClr val="accent1"/>
+          </a:effectRef>
+          <a:fontRef idx="minor">
+            <a:schemeClr val="lt1"/>
+          </a:fontRef>
+        </p:style>
+        <p:txBody>
+          <a:bodyPr rtlCol="0" anchor="ctr"/>
+          <a:lstStyle/>
+          <a:p>
+            <a:pPr algn="ctr"/>
+            <a:r>
+              <a:rPr lang="en-US" sz="1000" dirty="0"/>
+              <a:t>Equals</a:t>
+            </a:r>
+          </a:p>
+          <a:p>
+            <a:pPr algn="ctr"/>
+            <a:r>
+              <a:rPr lang="en-US" sz="1000" dirty="0"/>
+              <a:t>Infix Expression</a:t>
+            </a:r>
+          </a:p>
+        </p:txBody>
+      </p:sp>
+      <p:sp>
+        <p:nvSpPr>
+          <p:cNvPr id="53" name="Rectangle 52">
+            <a:extLst>
+              <a:ext uri="{FF2B5EF4-FFF2-40B4-BE49-F238E27FC236}">
+                <a16:creationId xmlns:a16="http://schemas.microsoft.com/office/drawing/2014/main" id="{FB653DE6-1E7C-F3F9-A2D9-639986D379BB}"/>
+              </a:ext>
+            </a:extLst>
+          </p:cNvPr>
+          <p:cNvSpPr/>
+          <p:nvPr/>
+        </p:nvSpPr>
+        <p:spPr>
+          <a:xfrm>
+            <a:off x="7363039" y="3599051"/>
+            <a:ext cx="1094678" cy="361407"/>
+          </a:xfrm>
+          <a:prstGeom prst="rect">
+            <a:avLst/>
+          </a:prstGeom>
+        </p:spPr>
+        <p:style>
+          <a:lnRef idx="2">
+            <a:schemeClr val="accent1">
+              <a:shade val="15000"/>
+            </a:schemeClr>
+          </a:lnRef>
+          <a:fillRef idx="1">
+            <a:schemeClr val="accent1"/>
+          </a:fillRef>
+          <a:effectRef idx="0">
+            <a:schemeClr val="accent1"/>
+          </a:effectRef>
+          <a:fontRef idx="minor">
+            <a:schemeClr val="lt1"/>
+          </a:fontRef>
+        </p:style>
+        <p:txBody>
+          <a:bodyPr rtlCol="0" anchor="ctr"/>
+          <a:lstStyle/>
+          <a:p>
+            <a:pPr algn="ctr"/>
+            <a:r>
+              <a:rPr lang="en-US" sz="1000" dirty="0"/>
+              <a:t>Multiplication</a:t>
+            </a:r>
+          </a:p>
+          <a:p>
+            <a:pPr algn="ctr"/>
+            <a:r>
+              <a:rPr lang="en-US" sz="1000" dirty="0"/>
+              <a:t>Infix Expression</a:t>
+            </a:r>
+          </a:p>
+        </p:txBody>
+      </p:sp>
+      <p:sp>
+        <p:nvSpPr>
+          <p:cNvPr id="54" name="Rectangle 53">
+            <a:extLst>
+              <a:ext uri="{FF2B5EF4-FFF2-40B4-BE49-F238E27FC236}">
+                <a16:creationId xmlns:a16="http://schemas.microsoft.com/office/drawing/2014/main" id="{B2E075CE-E96D-1067-D565-363848C5B64F}"/>
+              </a:ext>
+            </a:extLst>
+          </p:cNvPr>
+          <p:cNvSpPr/>
+          <p:nvPr/>
+        </p:nvSpPr>
+        <p:spPr>
+          <a:xfrm>
+            <a:off x="3854251" y="3593767"/>
+            <a:ext cx="1094678" cy="361407"/>
+          </a:xfrm>
+          <a:prstGeom prst="rect">
+            <a:avLst/>
+          </a:prstGeom>
+        </p:spPr>
+        <p:style>
+          <a:lnRef idx="2">
+            <a:schemeClr val="accent1">
+              <a:shade val="15000"/>
+            </a:schemeClr>
+          </a:lnRef>
+          <a:fillRef idx="1">
+            <a:schemeClr val="accent1"/>
+          </a:fillRef>
+          <a:effectRef idx="0">
+            <a:schemeClr val="accent1"/>
+          </a:effectRef>
+          <a:fontRef idx="minor">
+            <a:schemeClr val="lt1"/>
+          </a:fontRef>
+        </p:style>
+        <p:txBody>
+          <a:bodyPr rtlCol="0" anchor="ctr"/>
+          <a:lstStyle/>
+          <a:p>
+            <a:pPr algn="ctr"/>
+            <a:r>
+              <a:rPr lang="en-US" sz="1000" dirty="0"/>
+              <a:t>Addition</a:t>
+            </a:r>
+          </a:p>
+          <a:p>
+            <a:pPr algn="ctr"/>
+            <a:r>
+              <a:rPr lang="en-US" sz="1000" dirty="0"/>
+              <a:t>Infix Expression</a:t>
+            </a:r>
+          </a:p>
+        </p:txBody>
+      </p:sp>
+      <p:sp>
+        <p:nvSpPr>
+          <p:cNvPr id="55" name="Rectangle 54">
+            <a:extLst>
+              <a:ext uri="{FF2B5EF4-FFF2-40B4-BE49-F238E27FC236}">
+                <a16:creationId xmlns:a16="http://schemas.microsoft.com/office/drawing/2014/main" id="{5C3E49D5-67E2-FC13-67B1-67DC0AF63A6F}"/>
+              </a:ext>
+            </a:extLst>
+          </p:cNvPr>
+          <p:cNvSpPr/>
+          <p:nvPr/>
+        </p:nvSpPr>
+        <p:spPr>
+          <a:xfrm>
+            <a:off x="8532635" y="3610203"/>
+            <a:ext cx="1094678" cy="361407"/>
+          </a:xfrm>
+          <a:prstGeom prst="rect">
+            <a:avLst/>
+          </a:prstGeom>
+        </p:spPr>
+        <p:style>
+          <a:lnRef idx="2">
+            <a:schemeClr val="accent1">
+              <a:shade val="15000"/>
+            </a:schemeClr>
+          </a:lnRef>
+          <a:fillRef idx="1">
+            <a:schemeClr val="accent1"/>
+          </a:fillRef>
+          <a:effectRef idx="0">
+            <a:schemeClr val="accent1"/>
+          </a:effectRef>
+          <a:fontRef idx="minor">
+            <a:schemeClr val="lt1"/>
+          </a:fontRef>
+        </p:style>
+        <p:txBody>
+          <a:bodyPr rtlCol="0" anchor="ctr"/>
+          <a:lstStyle/>
+          <a:p>
+            <a:pPr algn="ctr"/>
+            <a:r>
+              <a:rPr lang="en-US" sz="1000" dirty="0"/>
+              <a:t>Subtraction</a:t>
+            </a:r>
+          </a:p>
+          <a:p>
+            <a:pPr algn="ctr"/>
+            <a:r>
+              <a:rPr lang="en-US" sz="1000" dirty="0"/>
+              <a:t>Infix Expression</a:t>
+            </a:r>
+          </a:p>
+        </p:txBody>
+      </p:sp>
+      <p:cxnSp>
+        <p:nvCxnSpPr>
+          <p:cNvPr id="90" name="Connector: Elbow 89">
+            <a:extLst>
+              <a:ext uri="{FF2B5EF4-FFF2-40B4-BE49-F238E27FC236}">
+                <a16:creationId xmlns:a16="http://schemas.microsoft.com/office/drawing/2014/main" id="{A755ED8B-DAC9-BEF0-2A64-AFD3355670DB}"/>
+              </a:ext>
+            </a:extLst>
+          </p:cNvPr>
+          <p:cNvCxnSpPr>
+            <a:stCxn id="54" idx="2"/>
+            <a:endCxn id="8" idx="0"/>
+          </p:cNvCxnSpPr>
+          <p:nvPr/>
+        </p:nvCxnSpPr>
+        <p:spPr>
+          <a:xfrm rot="16200000" flipH="1">
+            <a:off x="4919521" y="3437243"/>
+            <a:ext cx="1070903" cy="2106764"/>
+          </a:xfrm>
+          <a:prstGeom prst="bentConnector3">
+            <a:avLst/>
+          </a:prstGeom>
+          <a:ln>
+            <a:tailEnd type="triangle"/>
+          </a:ln>
+        </p:spPr>
+        <p:style>
+          <a:lnRef idx="2">
+            <a:schemeClr val="accent1"/>
+          </a:lnRef>
+          <a:fillRef idx="0">
+            <a:schemeClr val="accent1"/>
+          </a:fillRef>
+          <a:effectRef idx="1">
+            <a:schemeClr val="accent1"/>
+          </a:effectRef>
+          <a:fontRef idx="minor">
+            <a:schemeClr val="tx1"/>
+          </a:fontRef>
+        </p:style>
+      </p:cxnSp>
+      <p:cxnSp>
+        <p:nvCxnSpPr>
+          <p:cNvPr id="91" name="Connector: Elbow 90">
+            <a:extLst>
+              <a:ext uri="{FF2B5EF4-FFF2-40B4-BE49-F238E27FC236}">
+                <a16:creationId xmlns:a16="http://schemas.microsoft.com/office/drawing/2014/main" id="{94C263F1-DCC7-8716-24C2-797FCBD06D82}"/>
+              </a:ext>
+            </a:extLst>
+          </p:cNvPr>
+          <p:cNvCxnSpPr>
+            <a:cxnSpLocks/>
+            <a:stCxn id="51" idx="2"/>
+            <a:endCxn id="8" idx="0"/>
+          </p:cNvCxnSpPr>
+          <p:nvPr/>
+        </p:nvCxnSpPr>
+        <p:spPr>
+          <a:xfrm rot="16200000" flipH="1">
+            <a:off x="5504318" y="4022041"/>
+            <a:ext cx="1070904" cy="937168"/>
+          </a:xfrm>
+          <a:prstGeom prst="bentConnector3">
+            <a:avLst/>
+          </a:prstGeom>
+          <a:ln>
+            <a:tailEnd type="triangle"/>
+          </a:ln>
+        </p:spPr>
+        <p:style>
+          <a:lnRef idx="2">
+            <a:schemeClr val="accent1"/>
+          </a:lnRef>
+          <a:fillRef idx="0">
+            <a:schemeClr val="accent1"/>
+          </a:fillRef>
+          <a:effectRef idx="1">
+            <a:schemeClr val="accent1"/>
+          </a:effectRef>
+          <a:fontRef idx="minor">
+            <a:schemeClr val="tx1"/>
+          </a:fontRef>
+        </p:style>
+      </p:cxnSp>
+      <p:cxnSp>
+        <p:nvCxnSpPr>
+          <p:cNvPr id="94" name="Connector: Elbow 93">
+            <a:extLst>
+              <a:ext uri="{FF2B5EF4-FFF2-40B4-BE49-F238E27FC236}">
+                <a16:creationId xmlns:a16="http://schemas.microsoft.com/office/drawing/2014/main" id="{9900C957-7E51-BA0D-4AA6-1EE9FD46F03B}"/>
+              </a:ext>
+            </a:extLst>
+          </p:cNvPr>
+          <p:cNvCxnSpPr>
+            <a:cxnSpLocks/>
+            <a:stCxn id="52" idx="2"/>
+            <a:endCxn id="8" idx="0"/>
+          </p:cNvCxnSpPr>
+          <p:nvPr/>
+        </p:nvCxnSpPr>
+        <p:spPr>
+          <a:xfrm rot="5400000">
+            <a:off x="6089116" y="4374411"/>
+            <a:ext cx="1070904" cy="232428"/>
+          </a:xfrm>
+          <a:prstGeom prst="bentConnector3">
+            <a:avLst/>
+          </a:prstGeom>
+          <a:ln>
+            <a:tailEnd type="triangle"/>
+          </a:ln>
+        </p:spPr>
+        <p:style>
+          <a:lnRef idx="2">
+            <a:schemeClr val="accent1"/>
+          </a:lnRef>
+          <a:fillRef idx="0">
+            <a:schemeClr val="accent1"/>
+          </a:fillRef>
+          <a:effectRef idx="1">
+            <a:schemeClr val="accent1"/>
+          </a:effectRef>
+          <a:fontRef idx="minor">
+            <a:schemeClr val="tx1"/>
+          </a:fontRef>
+        </p:style>
+      </p:cxnSp>
+      <p:cxnSp>
+        <p:nvCxnSpPr>
+          <p:cNvPr id="97" name="Connector: Elbow 96">
+            <a:extLst>
+              <a:ext uri="{FF2B5EF4-FFF2-40B4-BE49-F238E27FC236}">
+                <a16:creationId xmlns:a16="http://schemas.microsoft.com/office/drawing/2014/main" id="{879AA4AE-890C-762F-EEF9-3B0493AA21FF}"/>
+              </a:ext>
+            </a:extLst>
+          </p:cNvPr>
+          <p:cNvCxnSpPr>
+            <a:cxnSpLocks/>
+            <a:stCxn id="53" idx="2"/>
+            <a:endCxn id="8" idx="0"/>
+          </p:cNvCxnSpPr>
+          <p:nvPr/>
+        </p:nvCxnSpPr>
+        <p:spPr>
+          <a:xfrm rot="5400000">
+            <a:off x="6676557" y="3792255"/>
+            <a:ext cx="1065619" cy="1402024"/>
+          </a:xfrm>
+          <a:prstGeom prst="bentConnector3">
+            <a:avLst>
+              <a:gd name="adj1" fmla="val 50000"/>
+            </a:avLst>
+          </a:prstGeom>
+          <a:ln>
+            <a:tailEnd type="triangle"/>
+          </a:ln>
+        </p:spPr>
+        <p:style>
+          <a:lnRef idx="2">
+            <a:schemeClr val="accent1"/>
+          </a:lnRef>
+          <a:fillRef idx="0">
+            <a:schemeClr val="accent1"/>
+          </a:fillRef>
+          <a:effectRef idx="1">
+            <a:schemeClr val="accent1"/>
+          </a:effectRef>
+          <a:fontRef idx="minor">
+            <a:schemeClr val="tx1"/>
+          </a:fontRef>
+        </p:style>
+      </p:cxnSp>
+      <p:cxnSp>
+        <p:nvCxnSpPr>
+          <p:cNvPr id="100" name="Connector: Elbow 99">
+            <a:extLst>
+              <a:ext uri="{FF2B5EF4-FFF2-40B4-BE49-F238E27FC236}">
+                <a16:creationId xmlns:a16="http://schemas.microsoft.com/office/drawing/2014/main" id="{B2D3615A-925F-14D8-8289-4150B297450F}"/>
+              </a:ext>
+            </a:extLst>
+          </p:cNvPr>
+          <p:cNvCxnSpPr>
+            <a:cxnSpLocks/>
+            <a:stCxn id="55" idx="2"/>
+            <a:endCxn id="8" idx="0"/>
+          </p:cNvCxnSpPr>
+          <p:nvPr/>
+        </p:nvCxnSpPr>
+        <p:spPr>
+          <a:xfrm rot="5400000">
+            <a:off x="7266931" y="3213033"/>
+            <a:ext cx="1054467" cy="2571620"/>
+          </a:xfrm>
+          <a:prstGeom prst="bentConnector3">
+            <a:avLst>
+              <a:gd name="adj1" fmla="val 50000"/>
+            </a:avLst>
+          </a:prstGeom>
+          <a:ln>
+            <a:tailEnd type="triangle"/>
+          </a:ln>
+        </p:spPr>
+        <p:style>
+          <a:lnRef idx="2">
+            <a:schemeClr val="accent1"/>
+          </a:lnRef>
+          <a:fillRef idx="0">
+            <a:schemeClr val="accent1"/>
+          </a:fillRef>
+          <a:effectRef idx="1">
+            <a:schemeClr val="accent1"/>
+          </a:effectRef>
+          <a:fontRef idx="minor">
+            <a:schemeClr val="tx1"/>
+          </a:fontRef>
+        </p:style>
+      </p:cxnSp>
+    </p:spTree>
+    <p:extLst>
+      <p:ext uri="{BB962C8B-B14F-4D97-AF65-F5344CB8AC3E}">
+        <p14:creationId xmlns:p14="http://schemas.microsoft.com/office/powerpoint/2010/main" val="3542833864"/>
+      </p:ext>
+    </p:extLst>
+  </p:cSld>
+  <p:clrMapOvr>
+    <a:masterClrMapping/>
+  </p:clrMapOvr>
+</p:sld>
+</file>
+
+<file path=ppt/slides/slide46.xml><?xml version="1.0" encoding="utf-8"?>
+<p:sld xmlns:a="http://schemas.openxmlformats.org/drawingml/2006/main" xmlns:r="http://schemas.openxmlformats.org/officeDocument/2006/relationships" xmlns:p="http://schemas.openxmlformats.org/presentationml/2006/main">
+  <p:cSld>
+    <p:spTree>
+      <p:nvGrpSpPr>
+        <p:cNvPr id="1" name=""/>
+        <p:cNvGrpSpPr/>
+        <p:nvPr/>
+      </p:nvGrpSpPr>
+      <p:grpSpPr>
+        <a:xfrm>
+          <a:off x="0" y="0"/>
+          <a:ext cx="0" cy="0"/>
+          <a:chOff x="0" y="0"/>
+          <a:chExt cx="0" cy="0"/>
+        </a:xfrm>
+      </p:grpSpPr>
+      <p:sp>
+        <p:nvSpPr>
+          <p:cNvPr id="2" name="Title 1">
+            <a:extLst>
+              <a:ext uri="{FF2B5EF4-FFF2-40B4-BE49-F238E27FC236}">
+                <a16:creationId xmlns:a16="http://schemas.microsoft.com/office/drawing/2014/main" id="{4B4D41B3-95FC-3E88-4520-AADC1DEFA7BA}"/>
+              </a:ext>
+            </a:extLst>
+          </p:cNvPr>
+          <p:cNvSpPr>
+            <a:spLocks noGrp="1"/>
+          </p:cNvSpPr>
+          <p:nvPr>
+            <p:ph type="title"/>
+          </p:nvPr>
+        </p:nvSpPr>
+        <p:spPr/>
+        <p:txBody>
+          <a:bodyPr/>
+          <a:lstStyle/>
+          <a:p>
+            <a:endParaRPr lang="en-US"/>
+          </a:p>
+        </p:txBody>
+      </p:sp>
+      <p:sp>
+        <p:nvSpPr>
+          <p:cNvPr id="3" name="Content Placeholder 2">
+            <a:extLst>
+              <a:ext uri="{FF2B5EF4-FFF2-40B4-BE49-F238E27FC236}">
+                <a16:creationId xmlns:a16="http://schemas.microsoft.com/office/drawing/2014/main" id="{1E016F07-138E-654C-976B-9CFEB21FDCAB}"/>
+              </a:ext>
+            </a:extLst>
+          </p:cNvPr>
+          <p:cNvSpPr>
+            <a:spLocks noGrp="1"/>
+          </p:cNvSpPr>
+          <p:nvPr>
+            <p:ph idx="1"/>
+          </p:nvPr>
+        </p:nvSpPr>
+        <p:spPr/>
+        <p:txBody>
+          <a:bodyPr/>
+          <a:lstStyle/>
+          <a:p>
+            <a:endParaRPr lang="en-US"/>
+          </a:p>
+        </p:txBody>
+      </p:sp>
+    </p:spTree>
+    <p:extLst>
+      <p:ext uri="{BB962C8B-B14F-4D97-AF65-F5344CB8AC3E}">
+        <p14:creationId xmlns:p14="http://schemas.microsoft.com/office/powerpoint/2010/main" val="2661187728"/>
+      </p:ext>
+    </p:extLst>
+  </p:cSld>
+  <p:clrMapOvr>
+    <a:masterClrMapping/>
+  </p:clrMapOvr>
+</p:sld>
+</file>
+
 <file path=ppt/slides/slide5.xml><?xml version="1.0" encoding="utf-8"?>
 <p:sld xmlns:a="http://schemas.openxmlformats.org/drawingml/2006/main" xmlns:r="http://schemas.openxmlformats.org/officeDocument/2006/relationships" xmlns:p="http://schemas.openxmlformats.org/presentationml/2006/main">
   <p:cSld>

--- a/Documents/Object Property Design and Binding.pptx
+++ b/Documents/Object Property Design and Binding.pptx
@@ -21375,6 +21375,104 @@
           </a:fontRef>
         </p:style>
       </p:cxnSp>
+      <p:sp>
+        <p:nvSpPr>
+          <p:cNvPr id="3" name="Rectangle 2">
+            <a:extLst>
+              <a:ext uri="{FF2B5EF4-FFF2-40B4-BE49-F238E27FC236}">
+                <a16:creationId xmlns:a16="http://schemas.microsoft.com/office/drawing/2014/main" id="{3D324C7A-496F-507F-29A0-E21C4B5C2F92}"/>
+              </a:ext>
+            </a:extLst>
+          </p:cNvPr>
+          <p:cNvSpPr/>
+          <p:nvPr/>
+        </p:nvSpPr>
+        <p:spPr>
+          <a:xfrm>
+            <a:off x="1029275" y="1690688"/>
+            <a:ext cx="1094678" cy="361407"/>
+          </a:xfrm>
+          <a:prstGeom prst="rect">
+            <a:avLst/>
+          </a:prstGeom>
+        </p:spPr>
+        <p:style>
+          <a:lnRef idx="2">
+            <a:schemeClr val="accent1">
+              <a:shade val="15000"/>
+            </a:schemeClr>
+          </a:lnRef>
+          <a:fillRef idx="1">
+            <a:schemeClr val="accent1"/>
+          </a:fillRef>
+          <a:effectRef idx="0">
+            <a:schemeClr val="accent1"/>
+          </a:effectRef>
+          <a:fontRef idx="minor">
+            <a:schemeClr val="lt1"/>
+          </a:fontRef>
+        </p:style>
+        <p:txBody>
+          <a:bodyPr rtlCol="0" anchor="ctr"/>
+          <a:lstStyle/>
+          <a:p>
+            <a:pPr algn="ctr"/>
+            <a:r>
+              <a:rPr lang="en-US" sz="1000" dirty="0"/>
+              <a:t>Expression Parser</a:t>
+            </a:r>
+          </a:p>
+        </p:txBody>
+      </p:sp>
+      <p:sp>
+        <p:nvSpPr>
+          <p:cNvPr id="11" name="Rectangle 10">
+            <a:extLst>
+              <a:ext uri="{FF2B5EF4-FFF2-40B4-BE49-F238E27FC236}">
+                <a16:creationId xmlns:a16="http://schemas.microsoft.com/office/drawing/2014/main" id="{850E8258-A869-11D7-D1BF-400A5C94EF93}"/>
+              </a:ext>
+            </a:extLst>
+          </p:cNvPr>
+          <p:cNvSpPr/>
+          <p:nvPr/>
+        </p:nvSpPr>
+        <p:spPr>
+          <a:xfrm>
+            <a:off x="1029275" y="2217508"/>
+            <a:ext cx="1094678" cy="361407"/>
+          </a:xfrm>
+          <a:prstGeom prst="rect">
+            <a:avLst/>
+          </a:prstGeom>
+        </p:spPr>
+        <p:style>
+          <a:lnRef idx="2">
+            <a:schemeClr val="accent1">
+              <a:shade val="15000"/>
+            </a:schemeClr>
+          </a:lnRef>
+          <a:fillRef idx="1">
+            <a:schemeClr val="accent1"/>
+          </a:fillRef>
+          <a:effectRef idx="0">
+            <a:schemeClr val="accent1"/>
+          </a:effectRef>
+          <a:fontRef idx="minor">
+            <a:schemeClr val="lt1"/>
+          </a:fontRef>
+        </p:style>
+        <p:txBody>
+          <a:bodyPr rtlCol="0" anchor="ctr"/>
+          <a:lstStyle/>
+          <a:p>
+            <a:pPr algn="ctr"/>
+            <a:r>
+              <a:rPr lang="en-US" sz="1000" dirty="0"/>
+              <a:t>Parse Language</a:t>
+            </a:r>
+          </a:p>
+        </p:txBody>
+      </p:sp>
     </p:spTree>
     <p:extLst>
       <p:ext uri="{BB962C8B-B14F-4D97-AF65-F5344CB8AC3E}">

--- a/Documents/Object Property Design and Binding.pptx
+++ b/Documents/Object Property Design and Binding.pptx
@@ -304,7 +304,7 @@
           <a:p>
             <a:fld id="{E7AEA4B1-7707-49BB-9265-EAC029350772}" type="datetimeFigureOut">
               <a:rPr lang="en-US" smtClean="0"/>
-              <a:t>5/28/2026</a:t>
+              <a:t>6/9/2026</a:t>
             </a:fld>
             <a:endParaRPr lang="en-US"/>
           </a:p>
@@ -502,7 +502,7 @@
           <a:p>
             <a:fld id="{E7AEA4B1-7707-49BB-9265-EAC029350772}" type="datetimeFigureOut">
               <a:rPr lang="en-US" smtClean="0"/>
-              <a:t>5/28/2026</a:t>
+              <a:t>6/9/2026</a:t>
             </a:fld>
             <a:endParaRPr lang="en-US"/>
           </a:p>
@@ -710,7 +710,7 @@
           <a:p>
             <a:fld id="{E7AEA4B1-7707-49BB-9265-EAC029350772}" type="datetimeFigureOut">
               <a:rPr lang="en-US" smtClean="0"/>
-              <a:t>5/28/2026</a:t>
+              <a:t>6/9/2026</a:t>
             </a:fld>
             <a:endParaRPr lang="en-US"/>
           </a:p>
@@ -908,7 +908,7 @@
           <a:p>
             <a:fld id="{E7AEA4B1-7707-49BB-9265-EAC029350772}" type="datetimeFigureOut">
               <a:rPr lang="en-US" smtClean="0"/>
-              <a:t>5/28/2026</a:t>
+              <a:t>6/9/2026</a:t>
             </a:fld>
             <a:endParaRPr lang="en-US"/>
           </a:p>
@@ -1183,7 +1183,7 @@
           <a:p>
             <a:fld id="{E7AEA4B1-7707-49BB-9265-EAC029350772}" type="datetimeFigureOut">
               <a:rPr lang="en-US" smtClean="0"/>
-              <a:t>5/28/2026</a:t>
+              <a:t>6/9/2026</a:t>
             </a:fld>
             <a:endParaRPr lang="en-US"/>
           </a:p>
@@ -1448,7 +1448,7 @@
           <a:p>
             <a:fld id="{E7AEA4B1-7707-49BB-9265-EAC029350772}" type="datetimeFigureOut">
               <a:rPr lang="en-US" smtClean="0"/>
-              <a:t>5/28/2026</a:t>
+              <a:t>6/9/2026</a:t>
             </a:fld>
             <a:endParaRPr lang="en-US"/>
           </a:p>
@@ -1860,7 +1860,7 @@
           <a:p>
             <a:fld id="{E7AEA4B1-7707-49BB-9265-EAC029350772}" type="datetimeFigureOut">
               <a:rPr lang="en-US" smtClean="0"/>
-              <a:t>5/28/2026</a:t>
+              <a:t>6/9/2026</a:t>
             </a:fld>
             <a:endParaRPr lang="en-US"/>
           </a:p>
@@ -2001,7 +2001,7 @@
           <a:p>
             <a:fld id="{E7AEA4B1-7707-49BB-9265-EAC029350772}" type="datetimeFigureOut">
               <a:rPr lang="en-US" smtClean="0"/>
-              <a:t>5/28/2026</a:t>
+              <a:t>6/9/2026</a:t>
             </a:fld>
             <a:endParaRPr lang="en-US"/>
           </a:p>
@@ -2114,7 +2114,7 @@
           <a:p>
             <a:fld id="{E7AEA4B1-7707-49BB-9265-EAC029350772}" type="datetimeFigureOut">
               <a:rPr lang="en-US" smtClean="0"/>
-              <a:t>5/28/2026</a:t>
+              <a:t>6/9/2026</a:t>
             </a:fld>
             <a:endParaRPr lang="en-US"/>
           </a:p>
@@ -2425,7 +2425,7 @@
           <a:p>
             <a:fld id="{E7AEA4B1-7707-49BB-9265-EAC029350772}" type="datetimeFigureOut">
               <a:rPr lang="en-US" smtClean="0"/>
-              <a:t>5/28/2026</a:t>
+              <a:t>6/9/2026</a:t>
             </a:fld>
             <a:endParaRPr lang="en-US"/>
           </a:p>
@@ -2713,7 +2713,7 @@
           <a:p>
             <a:fld id="{E7AEA4B1-7707-49BB-9265-EAC029350772}" type="datetimeFigureOut">
               <a:rPr lang="en-US" smtClean="0"/>
-              <a:t>5/28/2026</a:t>
+              <a:t>6/9/2026</a:t>
             </a:fld>
             <a:endParaRPr lang="en-US"/>
           </a:p>
@@ -2954,7 +2954,7 @@
           <a:p>
             <a:fld id="{E7AEA4B1-7707-49BB-9265-EAC029350772}" type="datetimeFigureOut">
               <a:rPr lang="en-US" smtClean="0"/>
-              <a:t>5/28/2026</a:t>
+              <a:t>6/9/2026</a:t>
             </a:fld>
             <a:endParaRPr lang="en-US"/>
           </a:p>
@@ -21524,35 +21524,603 @@
           <a:bodyPr/>
           <a:lstStyle/>
           <a:p>
-            <a:endParaRPr lang="en-US"/>
-          </a:p>
-        </p:txBody>
-      </p:sp>
-      <p:sp>
-        <p:nvSpPr>
-          <p:cNvPr id="3" name="Content Placeholder 2">
-            <a:extLst>
-              <a:ext uri="{FF2B5EF4-FFF2-40B4-BE49-F238E27FC236}">
-                <a16:creationId xmlns:a16="http://schemas.microsoft.com/office/drawing/2014/main" id="{1E016F07-138E-654C-976B-9CFEB21FDCAB}"/>
-              </a:ext>
-            </a:extLst>
-          </p:cNvPr>
-          <p:cNvSpPr>
-            <a:spLocks noGrp="1"/>
-          </p:cNvSpPr>
-          <p:nvPr>
-            <p:ph idx="1"/>
-          </p:nvPr>
-        </p:nvSpPr>
-        <p:spPr/>
-        <p:txBody>
-          <a:bodyPr/>
+            <a:r>
+              <a:rPr lang="en-US" dirty="0"/>
+              <a:t>Keystroke Source</a:t>
+            </a:r>
+          </a:p>
+        </p:txBody>
+      </p:sp>
+      <p:sp>
+        <p:nvSpPr>
+          <p:cNvPr id="4" name="Rectangle 3">
+            <a:extLst>
+              <a:ext uri="{FF2B5EF4-FFF2-40B4-BE49-F238E27FC236}">
+                <a16:creationId xmlns:a16="http://schemas.microsoft.com/office/drawing/2014/main" id="{87DC2ED0-919D-6771-99C6-0AB74063A577}"/>
+              </a:ext>
+            </a:extLst>
+          </p:cNvPr>
+          <p:cNvSpPr/>
+          <p:nvPr/>
+        </p:nvSpPr>
+        <p:spPr>
+          <a:xfrm>
+            <a:off x="5014331" y="2248250"/>
+            <a:ext cx="2163338" cy="506102"/>
+          </a:xfrm>
+          <a:prstGeom prst="rect">
+            <a:avLst/>
+          </a:prstGeom>
+        </p:spPr>
+        <p:style>
+          <a:lnRef idx="2">
+            <a:schemeClr val="accent1">
+              <a:shade val="15000"/>
+            </a:schemeClr>
+          </a:lnRef>
+          <a:fillRef idx="1">
+            <a:schemeClr val="accent1"/>
+          </a:fillRef>
+          <a:effectRef idx="0">
+            <a:schemeClr val="accent1"/>
+          </a:effectRef>
+          <a:fontRef idx="minor">
+            <a:schemeClr val="lt1"/>
+          </a:fontRef>
+        </p:style>
+        <p:txBody>
+          <a:bodyPr rtlCol="0" anchor="ctr"/>
           <a:lstStyle/>
           <a:p>
-            <a:endParaRPr lang="en-US"/>
-          </a:p>
-        </p:txBody>
-      </p:sp>
+            <a:pPr algn="ctr"/>
+            <a:r>
+              <a:rPr lang="en-US" dirty="0"/>
+              <a:t>Artificial Key Buffer</a:t>
+            </a:r>
+          </a:p>
+        </p:txBody>
+      </p:sp>
+      <p:sp>
+        <p:nvSpPr>
+          <p:cNvPr id="5" name="Rectangle 4">
+            <a:extLst>
+              <a:ext uri="{FF2B5EF4-FFF2-40B4-BE49-F238E27FC236}">
+                <a16:creationId xmlns:a16="http://schemas.microsoft.com/office/drawing/2014/main" id="{D41E095A-EF72-37CF-66D1-C5A26DECE1B0}"/>
+              </a:ext>
+            </a:extLst>
+          </p:cNvPr>
+          <p:cNvSpPr/>
+          <p:nvPr/>
+        </p:nvSpPr>
+        <p:spPr>
+          <a:xfrm>
+            <a:off x="5014331" y="1463367"/>
+            <a:ext cx="2163338" cy="506102"/>
+          </a:xfrm>
+          <a:prstGeom prst="rect">
+            <a:avLst/>
+          </a:prstGeom>
+        </p:spPr>
+        <p:style>
+          <a:lnRef idx="2">
+            <a:schemeClr val="accent1">
+              <a:shade val="15000"/>
+            </a:schemeClr>
+          </a:lnRef>
+          <a:fillRef idx="1">
+            <a:schemeClr val="accent1"/>
+          </a:fillRef>
+          <a:effectRef idx="0">
+            <a:schemeClr val="accent1"/>
+          </a:effectRef>
+          <a:fontRef idx="minor">
+            <a:schemeClr val="lt1"/>
+          </a:fontRef>
+        </p:style>
+        <p:txBody>
+          <a:bodyPr rtlCol="0" anchor="ctr"/>
+          <a:lstStyle/>
+          <a:p>
+            <a:pPr algn="ctr"/>
+            <a:r>
+              <a:rPr lang="en-US" dirty="0"/>
+              <a:t>Recorder</a:t>
+            </a:r>
+          </a:p>
+        </p:txBody>
+      </p:sp>
+      <p:sp>
+        <p:nvSpPr>
+          <p:cNvPr id="6" name="Rectangle 5">
+            <a:extLst>
+              <a:ext uri="{FF2B5EF4-FFF2-40B4-BE49-F238E27FC236}">
+                <a16:creationId xmlns:a16="http://schemas.microsoft.com/office/drawing/2014/main" id="{A19EB084-5D11-6A1D-AE26-7865410BB27F}"/>
+              </a:ext>
+            </a:extLst>
+          </p:cNvPr>
+          <p:cNvSpPr/>
+          <p:nvPr/>
+        </p:nvSpPr>
+        <p:spPr>
+          <a:xfrm>
+            <a:off x="4309946" y="3067711"/>
+            <a:ext cx="3572108" cy="506102"/>
+          </a:xfrm>
+          <a:prstGeom prst="rect">
+            <a:avLst/>
+          </a:prstGeom>
+        </p:spPr>
+        <p:style>
+          <a:lnRef idx="2">
+            <a:schemeClr val="accent1">
+              <a:shade val="15000"/>
+            </a:schemeClr>
+          </a:lnRef>
+          <a:fillRef idx="1">
+            <a:schemeClr val="accent1"/>
+          </a:fillRef>
+          <a:effectRef idx="0">
+            <a:schemeClr val="accent1"/>
+          </a:effectRef>
+          <a:fontRef idx="minor">
+            <a:schemeClr val="lt1"/>
+          </a:fontRef>
+        </p:style>
+        <p:txBody>
+          <a:bodyPr rtlCol="0" anchor="ctr"/>
+          <a:lstStyle/>
+          <a:p>
+            <a:pPr algn="ctr"/>
+            <a:r>
+              <a:rPr lang="en-US" dirty="0"/>
+              <a:t>Blocking Non-Blocking Support</a:t>
+            </a:r>
+          </a:p>
+        </p:txBody>
+      </p:sp>
+      <p:sp>
+        <p:nvSpPr>
+          <p:cNvPr id="7" name="Rectangle 6">
+            <a:extLst>
+              <a:ext uri="{FF2B5EF4-FFF2-40B4-BE49-F238E27FC236}">
+                <a16:creationId xmlns:a16="http://schemas.microsoft.com/office/drawing/2014/main" id="{327D4D52-875A-74F5-F8C5-827EE748E3A8}"/>
+              </a:ext>
+            </a:extLst>
+          </p:cNvPr>
+          <p:cNvSpPr/>
+          <p:nvPr/>
+        </p:nvSpPr>
+        <p:spPr>
+          <a:xfrm>
+            <a:off x="5014331" y="3852594"/>
+            <a:ext cx="2163338" cy="506102"/>
+          </a:xfrm>
+          <a:prstGeom prst="rect">
+            <a:avLst/>
+          </a:prstGeom>
+        </p:spPr>
+        <p:style>
+          <a:lnRef idx="2">
+            <a:schemeClr val="accent1">
+              <a:shade val="15000"/>
+            </a:schemeClr>
+          </a:lnRef>
+          <a:fillRef idx="1">
+            <a:schemeClr val="accent1"/>
+          </a:fillRef>
+          <a:effectRef idx="0">
+            <a:schemeClr val="accent1"/>
+          </a:effectRef>
+          <a:fontRef idx="minor">
+            <a:schemeClr val="lt1"/>
+          </a:fontRef>
+        </p:style>
+        <p:txBody>
+          <a:bodyPr rtlCol="0" anchor="ctr"/>
+          <a:lstStyle/>
+          <a:p>
+            <a:pPr algn="ctr"/>
+            <a:r>
+              <a:rPr lang="en-US" dirty="0"/>
+              <a:t>Game Replay</a:t>
+            </a:r>
+          </a:p>
+        </p:txBody>
+      </p:sp>
+      <p:sp>
+        <p:nvSpPr>
+          <p:cNvPr id="8" name="Rectangle 7">
+            <a:extLst>
+              <a:ext uri="{FF2B5EF4-FFF2-40B4-BE49-F238E27FC236}">
+                <a16:creationId xmlns:a16="http://schemas.microsoft.com/office/drawing/2014/main" id="{47269CCF-43FC-ED30-11A5-AAE364F1B008}"/>
+              </a:ext>
+            </a:extLst>
+          </p:cNvPr>
+          <p:cNvSpPr/>
+          <p:nvPr/>
+        </p:nvSpPr>
+        <p:spPr>
+          <a:xfrm>
+            <a:off x="5014331" y="4697785"/>
+            <a:ext cx="2163338" cy="506102"/>
+          </a:xfrm>
+          <a:prstGeom prst="rect">
+            <a:avLst/>
+          </a:prstGeom>
+        </p:spPr>
+        <p:style>
+          <a:lnRef idx="2">
+            <a:schemeClr val="accent1">
+              <a:shade val="15000"/>
+            </a:schemeClr>
+          </a:lnRef>
+          <a:fillRef idx="1">
+            <a:schemeClr val="accent1"/>
+          </a:fillRef>
+          <a:effectRef idx="0">
+            <a:schemeClr val="accent1"/>
+          </a:effectRef>
+          <a:fontRef idx="minor">
+            <a:schemeClr val="lt1"/>
+          </a:fontRef>
+        </p:style>
+        <p:txBody>
+          <a:bodyPr rtlCol="0" anchor="ctr"/>
+          <a:lstStyle/>
+          <a:p>
+            <a:pPr algn="ctr"/>
+            <a:r>
+              <a:rPr lang="en-US" dirty="0"/>
+              <a:t>Wait On Enqueue</a:t>
+            </a:r>
+          </a:p>
+        </p:txBody>
+      </p:sp>
+      <p:cxnSp>
+        <p:nvCxnSpPr>
+          <p:cNvPr id="10" name="Straight Arrow Connector 9">
+            <a:extLst>
+              <a:ext uri="{FF2B5EF4-FFF2-40B4-BE49-F238E27FC236}">
+                <a16:creationId xmlns:a16="http://schemas.microsoft.com/office/drawing/2014/main" id="{508DCF48-7840-261C-7460-3599AA221B8B}"/>
+              </a:ext>
+            </a:extLst>
+          </p:cNvPr>
+          <p:cNvCxnSpPr>
+            <a:stCxn id="4" idx="0"/>
+            <a:endCxn id="5" idx="2"/>
+          </p:cNvCxnSpPr>
+          <p:nvPr/>
+        </p:nvCxnSpPr>
+        <p:spPr>
+          <a:xfrm flipV="1">
+            <a:off x="6096000" y="1969469"/>
+            <a:ext cx="0" cy="278781"/>
+          </a:xfrm>
+          <a:prstGeom prst="straightConnector1">
+            <a:avLst/>
+          </a:prstGeom>
+          <a:ln>
+            <a:tailEnd type="triangle"/>
+          </a:ln>
+        </p:spPr>
+        <p:style>
+          <a:lnRef idx="2">
+            <a:schemeClr val="accent1"/>
+          </a:lnRef>
+          <a:fillRef idx="0">
+            <a:schemeClr val="accent1"/>
+          </a:fillRef>
+          <a:effectRef idx="1">
+            <a:schemeClr val="accent1"/>
+          </a:effectRef>
+          <a:fontRef idx="minor">
+            <a:schemeClr val="tx1"/>
+          </a:fontRef>
+        </p:style>
+      </p:cxnSp>
+      <p:cxnSp>
+        <p:nvCxnSpPr>
+          <p:cNvPr id="12" name="Straight Arrow Connector 11">
+            <a:extLst>
+              <a:ext uri="{FF2B5EF4-FFF2-40B4-BE49-F238E27FC236}">
+                <a16:creationId xmlns:a16="http://schemas.microsoft.com/office/drawing/2014/main" id="{B051DCC4-2C31-BB23-FBBF-0090E463A33D}"/>
+              </a:ext>
+            </a:extLst>
+          </p:cNvPr>
+          <p:cNvCxnSpPr>
+            <a:stCxn id="6" idx="0"/>
+            <a:endCxn id="4" idx="2"/>
+          </p:cNvCxnSpPr>
+          <p:nvPr/>
+        </p:nvCxnSpPr>
+        <p:spPr>
+          <a:xfrm flipV="1">
+            <a:off x="6096000" y="2754352"/>
+            <a:ext cx="0" cy="313359"/>
+          </a:xfrm>
+          <a:prstGeom prst="straightConnector1">
+            <a:avLst/>
+          </a:prstGeom>
+          <a:ln>
+            <a:tailEnd type="triangle"/>
+          </a:ln>
+        </p:spPr>
+        <p:style>
+          <a:lnRef idx="2">
+            <a:schemeClr val="accent1"/>
+          </a:lnRef>
+          <a:fillRef idx="0">
+            <a:schemeClr val="accent1"/>
+          </a:fillRef>
+          <a:effectRef idx="1">
+            <a:schemeClr val="accent1"/>
+          </a:effectRef>
+          <a:fontRef idx="minor">
+            <a:schemeClr val="tx1"/>
+          </a:fontRef>
+        </p:style>
+      </p:cxnSp>
+      <p:cxnSp>
+        <p:nvCxnSpPr>
+          <p:cNvPr id="13" name="Straight Arrow Connector 12">
+            <a:extLst>
+              <a:ext uri="{FF2B5EF4-FFF2-40B4-BE49-F238E27FC236}">
+                <a16:creationId xmlns:a16="http://schemas.microsoft.com/office/drawing/2014/main" id="{D6DC6E96-4BAB-29C1-438F-497D1904BF01}"/>
+              </a:ext>
+            </a:extLst>
+          </p:cNvPr>
+          <p:cNvCxnSpPr>
+            <a:cxnSpLocks/>
+            <a:stCxn id="8" idx="0"/>
+            <a:endCxn id="7" idx="2"/>
+          </p:cNvCxnSpPr>
+          <p:nvPr/>
+        </p:nvCxnSpPr>
+        <p:spPr>
+          <a:xfrm flipV="1">
+            <a:off x="6096000" y="4358696"/>
+            <a:ext cx="0" cy="339089"/>
+          </a:xfrm>
+          <a:prstGeom prst="straightConnector1">
+            <a:avLst/>
+          </a:prstGeom>
+          <a:ln>
+            <a:tailEnd type="triangle"/>
+          </a:ln>
+        </p:spPr>
+        <p:style>
+          <a:lnRef idx="2">
+            <a:schemeClr val="accent1"/>
+          </a:lnRef>
+          <a:fillRef idx="0">
+            <a:schemeClr val="accent1"/>
+          </a:fillRef>
+          <a:effectRef idx="1">
+            <a:schemeClr val="accent1"/>
+          </a:effectRef>
+          <a:fontRef idx="minor">
+            <a:schemeClr val="tx1"/>
+          </a:fontRef>
+        </p:style>
+      </p:cxnSp>
+      <p:cxnSp>
+        <p:nvCxnSpPr>
+          <p:cNvPr id="16" name="Straight Arrow Connector 15">
+            <a:extLst>
+              <a:ext uri="{FF2B5EF4-FFF2-40B4-BE49-F238E27FC236}">
+                <a16:creationId xmlns:a16="http://schemas.microsoft.com/office/drawing/2014/main" id="{3FB08FDE-2F16-7D39-53EF-93357FD41BA5}"/>
+              </a:ext>
+            </a:extLst>
+          </p:cNvPr>
+          <p:cNvCxnSpPr>
+            <a:cxnSpLocks/>
+            <a:stCxn id="7" idx="0"/>
+            <a:endCxn id="6" idx="2"/>
+          </p:cNvCxnSpPr>
+          <p:nvPr/>
+        </p:nvCxnSpPr>
+        <p:spPr>
+          <a:xfrm flipV="1">
+            <a:off x="6096000" y="3573813"/>
+            <a:ext cx="0" cy="278781"/>
+          </a:xfrm>
+          <a:prstGeom prst="straightConnector1">
+            <a:avLst/>
+          </a:prstGeom>
+          <a:ln>
+            <a:tailEnd type="triangle"/>
+          </a:ln>
+        </p:spPr>
+        <p:style>
+          <a:lnRef idx="2">
+            <a:schemeClr val="accent1"/>
+          </a:lnRef>
+          <a:fillRef idx="0">
+            <a:schemeClr val="accent1"/>
+          </a:fillRef>
+          <a:effectRef idx="1">
+            <a:schemeClr val="accent1"/>
+          </a:effectRef>
+          <a:fontRef idx="minor">
+            <a:schemeClr val="tx1"/>
+          </a:fontRef>
+        </p:style>
+      </p:cxnSp>
+      <p:cxnSp>
+        <p:nvCxnSpPr>
+          <p:cNvPr id="19" name="Straight Arrow Connector 18">
+            <a:extLst>
+              <a:ext uri="{FF2B5EF4-FFF2-40B4-BE49-F238E27FC236}">
+                <a16:creationId xmlns:a16="http://schemas.microsoft.com/office/drawing/2014/main" id="{D5B157F5-6C90-2511-44A4-5E4E410C7515}"/>
+              </a:ext>
+            </a:extLst>
+          </p:cNvPr>
+          <p:cNvCxnSpPr>
+            <a:cxnSpLocks/>
+            <a:stCxn id="5" idx="0"/>
+          </p:cNvCxnSpPr>
+          <p:nvPr/>
+        </p:nvCxnSpPr>
+        <p:spPr>
+          <a:xfrm flipV="1">
+            <a:off x="6096000" y="1027906"/>
+            <a:ext cx="0" cy="435461"/>
+          </a:xfrm>
+          <a:prstGeom prst="straightConnector1">
+            <a:avLst/>
+          </a:prstGeom>
+          <a:ln>
+            <a:tailEnd type="triangle"/>
+          </a:ln>
+        </p:spPr>
+        <p:style>
+          <a:lnRef idx="2">
+            <a:schemeClr val="accent1"/>
+          </a:lnRef>
+          <a:fillRef idx="0">
+            <a:schemeClr val="accent1"/>
+          </a:fillRef>
+          <a:effectRef idx="1">
+            <a:schemeClr val="accent1"/>
+          </a:effectRef>
+          <a:fontRef idx="minor">
+            <a:schemeClr val="tx1"/>
+          </a:fontRef>
+        </p:style>
+      </p:cxnSp>
+      <p:cxnSp>
+        <p:nvCxnSpPr>
+          <p:cNvPr id="22" name="Straight Arrow Connector 21">
+            <a:extLst>
+              <a:ext uri="{FF2B5EF4-FFF2-40B4-BE49-F238E27FC236}">
+                <a16:creationId xmlns:a16="http://schemas.microsoft.com/office/drawing/2014/main" id="{3196AB38-D8C4-6839-3F70-A61431D264E5}"/>
+              </a:ext>
+            </a:extLst>
+          </p:cNvPr>
+          <p:cNvCxnSpPr>
+            <a:cxnSpLocks/>
+            <a:endCxn id="8" idx="2"/>
+          </p:cNvCxnSpPr>
+          <p:nvPr/>
+        </p:nvCxnSpPr>
+        <p:spPr>
+          <a:xfrm flipV="1">
+            <a:off x="6096000" y="5203887"/>
+            <a:ext cx="0" cy="427479"/>
+          </a:xfrm>
+          <a:prstGeom prst="straightConnector1">
+            <a:avLst/>
+          </a:prstGeom>
+          <a:ln>
+            <a:tailEnd type="triangle"/>
+          </a:ln>
+        </p:spPr>
+        <p:style>
+          <a:lnRef idx="2">
+            <a:schemeClr val="accent1"/>
+          </a:lnRef>
+          <a:fillRef idx="0">
+            <a:schemeClr val="accent1"/>
+          </a:fillRef>
+          <a:effectRef idx="1">
+            <a:schemeClr val="accent1"/>
+          </a:effectRef>
+          <a:fontRef idx="minor">
+            <a:schemeClr val="tx1"/>
+          </a:fontRef>
+        </p:style>
+      </p:cxnSp>
+      <p:sp>
+        <p:nvSpPr>
+          <p:cNvPr id="28" name="Rectangle 27">
+            <a:extLst>
+              <a:ext uri="{FF2B5EF4-FFF2-40B4-BE49-F238E27FC236}">
+                <a16:creationId xmlns:a16="http://schemas.microsoft.com/office/drawing/2014/main" id="{21D9BE91-C44A-A6A9-1694-B3A338F159EB}"/>
+              </a:ext>
+            </a:extLst>
+          </p:cNvPr>
+          <p:cNvSpPr/>
+          <p:nvPr/>
+        </p:nvSpPr>
+        <p:spPr>
+          <a:xfrm>
+            <a:off x="5014331" y="5577043"/>
+            <a:ext cx="2163338" cy="506102"/>
+          </a:xfrm>
+          <a:prstGeom prst="rect">
+            <a:avLst/>
+          </a:prstGeom>
+        </p:spPr>
+        <p:style>
+          <a:lnRef idx="2">
+            <a:schemeClr val="accent1">
+              <a:shade val="15000"/>
+            </a:schemeClr>
+          </a:lnRef>
+          <a:fillRef idx="1">
+            <a:schemeClr val="accent1"/>
+          </a:fillRef>
+          <a:effectRef idx="0">
+            <a:schemeClr val="accent1"/>
+          </a:effectRef>
+          <a:fontRef idx="minor">
+            <a:schemeClr val="lt1"/>
+          </a:fontRef>
+        </p:style>
+        <p:txBody>
+          <a:bodyPr rtlCol="0" anchor="ctr"/>
+          <a:lstStyle/>
+          <a:p>
+            <a:pPr algn="ctr"/>
+            <a:r>
+              <a:rPr lang="en-US" dirty="0"/>
+              <a:t>Console</a:t>
+            </a:r>
+          </a:p>
+        </p:txBody>
+      </p:sp>
+      <p:cxnSp>
+        <p:nvCxnSpPr>
+          <p:cNvPr id="29" name="Straight Arrow Connector 28">
+            <a:extLst>
+              <a:ext uri="{FF2B5EF4-FFF2-40B4-BE49-F238E27FC236}">
+                <a16:creationId xmlns:a16="http://schemas.microsoft.com/office/drawing/2014/main" id="{3B197CF4-647E-5373-0476-C3B298D2023D}"/>
+              </a:ext>
+            </a:extLst>
+          </p:cNvPr>
+          <p:cNvCxnSpPr>
+            <a:cxnSpLocks/>
+            <a:endCxn id="28" idx="2"/>
+          </p:cNvCxnSpPr>
+          <p:nvPr/>
+        </p:nvCxnSpPr>
+        <p:spPr>
+          <a:xfrm flipV="1">
+            <a:off x="6096000" y="6083145"/>
+            <a:ext cx="0" cy="484923"/>
+          </a:xfrm>
+          <a:prstGeom prst="straightConnector1">
+            <a:avLst/>
+          </a:prstGeom>
+          <a:ln>
+            <a:tailEnd type="triangle"/>
+          </a:ln>
+        </p:spPr>
+        <p:style>
+          <a:lnRef idx="2">
+            <a:schemeClr val="accent1"/>
+          </a:lnRef>
+          <a:fillRef idx="0">
+            <a:schemeClr val="accent1"/>
+          </a:fillRef>
+          <a:effectRef idx="1">
+            <a:schemeClr val="accent1"/>
+          </a:effectRef>
+          <a:fontRef idx="minor">
+            <a:schemeClr val="tx1"/>
+          </a:fontRef>
+        </p:style>
+      </p:cxnSp>
     </p:spTree>
     <p:extLst>
       <p:ext uri="{BB962C8B-B14F-4D97-AF65-F5344CB8AC3E}">

--- a/Documents/Object Property Design and Binding.pptx
+++ b/Documents/Object Property Design and Binding.pptx
@@ -305,7 +305,7 @@
           <a:p>
             <a:fld id="{E7AEA4B1-7707-49BB-9265-EAC029350772}" type="datetimeFigureOut">
               <a:rPr lang="en-US" smtClean="0"/>
-              <a:t>6/12/2026</a:t>
+              <a:t>6/13/2026</a:t>
             </a:fld>
             <a:endParaRPr lang="en-US"/>
           </a:p>
@@ -503,7 +503,7 @@
           <a:p>
             <a:fld id="{E7AEA4B1-7707-49BB-9265-EAC029350772}" type="datetimeFigureOut">
               <a:rPr lang="en-US" smtClean="0"/>
-              <a:t>6/12/2026</a:t>
+              <a:t>6/13/2026</a:t>
             </a:fld>
             <a:endParaRPr lang="en-US"/>
           </a:p>
@@ -711,7 +711,7 @@
           <a:p>
             <a:fld id="{E7AEA4B1-7707-49BB-9265-EAC029350772}" type="datetimeFigureOut">
               <a:rPr lang="en-US" smtClean="0"/>
-              <a:t>6/12/2026</a:t>
+              <a:t>6/13/2026</a:t>
             </a:fld>
             <a:endParaRPr lang="en-US"/>
           </a:p>
@@ -909,7 +909,7 @@
           <a:p>
             <a:fld id="{E7AEA4B1-7707-49BB-9265-EAC029350772}" type="datetimeFigureOut">
               <a:rPr lang="en-US" smtClean="0"/>
-              <a:t>6/12/2026</a:t>
+              <a:t>6/13/2026</a:t>
             </a:fld>
             <a:endParaRPr lang="en-US"/>
           </a:p>
@@ -1184,7 +1184,7 @@
           <a:p>
             <a:fld id="{E7AEA4B1-7707-49BB-9265-EAC029350772}" type="datetimeFigureOut">
               <a:rPr lang="en-US" smtClean="0"/>
-              <a:t>6/12/2026</a:t>
+              <a:t>6/13/2026</a:t>
             </a:fld>
             <a:endParaRPr lang="en-US"/>
           </a:p>
@@ -1449,7 +1449,7 @@
           <a:p>
             <a:fld id="{E7AEA4B1-7707-49BB-9265-EAC029350772}" type="datetimeFigureOut">
               <a:rPr lang="en-US" smtClean="0"/>
-              <a:t>6/12/2026</a:t>
+              <a:t>6/13/2026</a:t>
             </a:fld>
             <a:endParaRPr lang="en-US"/>
           </a:p>
@@ -1861,7 +1861,7 @@
           <a:p>
             <a:fld id="{E7AEA4B1-7707-49BB-9265-EAC029350772}" type="datetimeFigureOut">
               <a:rPr lang="en-US" smtClean="0"/>
-              <a:t>6/12/2026</a:t>
+              <a:t>6/13/2026</a:t>
             </a:fld>
             <a:endParaRPr lang="en-US"/>
           </a:p>
@@ -2002,7 +2002,7 @@
           <a:p>
             <a:fld id="{E7AEA4B1-7707-49BB-9265-EAC029350772}" type="datetimeFigureOut">
               <a:rPr lang="en-US" smtClean="0"/>
-              <a:t>6/12/2026</a:t>
+              <a:t>6/13/2026</a:t>
             </a:fld>
             <a:endParaRPr lang="en-US"/>
           </a:p>
@@ -2115,7 +2115,7 @@
           <a:p>
             <a:fld id="{E7AEA4B1-7707-49BB-9265-EAC029350772}" type="datetimeFigureOut">
               <a:rPr lang="en-US" smtClean="0"/>
-              <a:t>6/12/2026</a:t>
+              <a:t>6/13/2026</a:t>
             </a:fld>
             <a:endParaRPr lang="en-US"/>
           </a:p>
@@ -2426,7 +2426,7 @@
           <a:p>
             <a:fld id="{E7AEA4B1-7707-49BB-9265-EAC029350772}" type="datetimeFigureOut">
               <a:rPr lang="en-US" smtClean="0"/>
-              <a:t>6/12/2026</a:t>
+              <a:t>6/13/2026</a:t>
             </a:fld>
             <a:endParaRPr lang="en-US"/>
           </a:p>
@@ -2714,7 +2714,7 @@
           <a:p>
             <a:fld id="{E7AEA4B1-7707-49BB-9265-EAC029350772}" type="datetimeFigureOut">
               <a:rPr lang="en-US" smtClean="0"/>
-              <a:t>6/12/2026</a:t>
+              <a:t>6/13/2026</a:t>
             </a:fld>
             <a:endParaRPr lang="en-US"/>
           </a:p>
@@ -2955,7 +2955,7 @@
           <a:p>
             <a:fld id="{E7AEA4B1-7707-49BB-9265-EAC029350772}" type="datetimeFigureOut">
               <a:rPr lang="en-US" smtClean="0"/>
-              <a:t>6/12/2026</a:t>
+              <a:t>6/13/2026</a:t>
             </a:fld>
             <a:endParaRPr lang="en-US"/>
           </a:p>
@@ -12366,8 +12366,43 @@
               <a:t>wget</a:t>
             </a:r>
             <a:r>
-              <a:rPr lang="en-US"/>
+              <a:rPr lang="en-US" dirty="0"/>
               <a:t> dotnet-install.sh)</a:t>
+            </a:r>
+          </a:p>
+          <a:p>
+            <a:pPr marL="514350" indent="-514350">
+              <a:buFont typeface="+mj-lt"/>
+              <a:buAutoNum type="arabicPeriod"/>
+            </a:pPr>
+            <a:r>
+              <a:rPr lang="en-US" dirty="0"/>
+              <a:t>Publish the game as a native single file </a:t>
+            </a:r>
+            <a:r>
+              <a:rPr lang="en-US" dirty="0" err="1"/>
+              <a:t>linux</a:t>
+            </a:r>
+            <a:r>
+              <a:rPr lang="en-US" dirty="0"/>
+              <a:t> executable:</a:t>
+            </a:r>
+          </a:p>
+          <a:p>
+            <a:pPr marL="0" indent="0">
+              <a:buNone/>
+            </a:pPr>
+            <a:r>
+              <a:rPr lang="en-US" dirty="0"/>
+              <a:t>dotnet publish -c Debug -r linux-x64 --self-contained true -</a:t>
+            </a:r>
+            <a:r>
+              <a:rPr lang="en-US" dirty="0" err="1"/>
+              <a:t>p:PublishSingleFile</a:t>
+            </a:r>
+            <a:r>
+              <a:rPr lang="en-US" dirty="0"/>
+              <a:t>=true</a:t>
             </a:r>
           </a:p>
           <a:p>
